--- a/3_테이블명세서_한빛마트온라인몰.pptx
+++ b/3_테이블명세서_한빛마트온라인몰.pptx
@@ -274,7 +274,7 @@
           <a:p>
             <a:fld id="{5638DD08-D0E9-4900-AA37-F5F79A690867}" type="datetimeFigureOut">
               <a:rPr lang="ko-KR" altLang="en-US" smtClean="0"/>
-              <a:t>2025-11-10-Mon</a:t>
+              <a:t>2025-11-17-Mon</a:t>
             </a:fld>
             <a:endParaRPr lang="ko-KR" altLang="en-US"/>
           </a:p>
@@ -472,7 +472,7 @@
           <a:p>
             <a:fld id="{5638DD08-D0E9-4900-AA37-F5F79A690867}" type="datetimeFigureOut">
               <a:rPr lang="ko-KR" altLang="en-US" smtClean="0"/>
-              <a:t>2025-11-10-Mon</a:t>
+              <a:t>2025-11-17-Mon</a:t>
             </a:fld>
             <a:endParaRPr lang="ko-KR" altLang="en-US"/>
           </a:p>
@@ -680,7 +680,7 @@
           <a:p>
             <a:fld id="{5638DD08-D0E9-4900-AA37-F5F79A690867}" type="datetimeFigureOut">
               <a:rPr lang="ko-KR" altLang="en-US" smtClean="0"/>
-              <a:t>2025-11-10-Mon</a:t>
+              <a:t>2025-11-17-Mon</a:t>
             </a:fld>
             <a:endParaRPr lang="ko-KR" altLang="en-US"/>
           </a:p>
@@ -878,7 +878,7 @@
           <a:p>
             <a:fld id="{5638DD08-D0E9-4900-AA37-F5F79A690867}" type="datetimeFigureOut">
               <a:rPr lang="ko-KR" altLang="en-US" smtClean="0"/>
-              <a:t>2025-11-10-Mon</a:t>
+              <a:t>2025-11-17-Mon</a:t>
             </a:fld>
             <a:endParaRPr lang="ko-KR" altLang="en-US"/>
           </a:p>
@@ -1153,7 +1153,7 @@
           <a:p>
             <a:fld id="{5638DD08-D0E9-4900-AA37-F5F79A690867}" type="datetimeFigureOut">
               <a:rPr lang="ko-KR" altLang="en-US" smtClean="0"/>
-              <a:t>2025-11-10-Mon</a:t>
+              <a:t>2025-11-17-Mon</a:t>
             </a:fld>
             <a:endParaRPr lang="ko-KR" altLang="en-US"/>
           </a:p>
@@ -1418,7 +1418,7 @@
           <a:p>
             <a:fld id="{5638DD08-D0E9-4900-AA37-F5F79A690867}" type="datetimeFigureOut">
               <a:rPr lang="ko-KR" altLang="en-US" smtClean="0"/>
-              <a:t>2025-11-10-Mon</a:t>
+              <a:t>2025-11-17-Mon</a:t>
             </a:fld>
             <a:endParaRPr lang="ko-KR" altLang="en-US"/>
           </a:p>
@@ -1830,7 +1830,7 @@
           <a:p>
             <a:fld id="{5638DD08-D0E9-4900-AA37-F5F79A690867}" type="datetimeFigureOut">
               <a:rPr lang="ko-KR" altLang="en-US" smtClean="0"/>
-              <a:t>2025-11-10-Mon</a:t>
+              <a:t>2025-11-17-Mon</a:t>
             </a:fld>
             <a:endParaRPr lang="ko-KR" altLang="en-US"/>
           </a:p>
@@ -1971,7 +1971,7 @@
           <a:p>
             <a:fld id="{5638DD08-D0E9-4900-AA37-F5F79A690867}" type="datetimeFigureOut">
               <a:rPr lang="ko-KR" altLang="en-US" smtClean="0"/>
-              <a:t>2025-11-10-Mon</a:t>
+              <a:t>2025-11-17-Mon</a:t>
             </a:fld>
             <a:endParaRPr lang="ko-KR" altLang="en-US"/>
           </a:p>
@@ -2084,7 +2084,7 @@
           <a:p>
             <a:fld id="{5638DD08-D0E9-4900-AA37-F5F79A690867}" type="datetimeFigureOut">
               <a:rPr lang="ko-KR" altLang="en-US" smtClean="0"/>
-              <a:t>2025-11-10-Mon</a:t>
+              <a:t>2025-11-17-Mon</a:t>
             </a:fld>
             <a:endParaRPr lang="ko-KR" altLang="en-US"/>
           </a:p>
@@ -2395,7 +2395,7 @@
           <a:p>
             <a:fld id="{5638DD08-D0E9-4900-AA37-F5F79A690867}" type="datetimeFigureOut">
               <a:rPr lang="ko-KR" altLang="en-US" smtClean="0"/>
-              <a:t>2025-11-10-Mon</a:t>
+              <a:t>2025-11-17-Mon</a:t>
             </a:fld>
             <a:endParaRPr lang="ko-KR" altLang="en-US"/>
           </a:p>
@@ -2683,7 +2683,7 @@
           <a:p>
             <a:fld id="{5638DD08-D0E9-4900-AA37-F5F79A690867}" type="datetimeFigureOut">
               <a:rPr lang="ko-KR" altLang="en-US" smtClean="0"/>
-              <a:t>2025-11-10-Mon</a:t>
+              <a:t>2025-11-17-Mon</a:t>
             </a:fld>
             <a:endParaRPr lang="ko-KR" altLang="en-US"/>
           </a:p>
@@ -2924,7 +2924,7 @@
           <a:p>
             <a:fld id="{5638DD08-D0E9-4900-AA37-F5F79A690867}" type="datetimeFigureOut">
               <a:rPr lang="ko-KR" altLang="en-US" smtClean="0"/>
-              <a:t>2025-11-10-Mon</a:t>
+              <a:t>2025-11-17-Mon</a:t>
             </a:fld>
             <a:endParaRPr lang="ko-KR" altLang="en-US"/>
           </a:p>
@@ -7040,7 +7040,7 @@
           <p:nvPr>
             <p:extLst>
               <p:ext uri="{D42A27DB-BD31-4B8C-83A1-F6EECF244321}">
-                <p14:modId xmlns:p14="http://schemas.microsoft.com/office/powerpoint/2010/main" val="2524017950"/>
+                <p14:modId xmlns:p14="http://schemas.microsoft.com/office/powerpoint/2010/main" val="3034623047"/>
               </p:ext>
             </p:extLst>
           </p:nvPr>
@@ -9441,7 +9441,7 @@
                           <a:latin typeface="D2Coding" panose="020B0609020101020101" pitchFamily="49" charset="-127"/>
                           <a:ea typeface="D2Coding" panose="020B0609020101020101" pitchFamily="49" charset="-127"/>
                         </a:rPr>
-                        <a:t>공급수량</a:t>
+                        <a:t>공급일자</a:t>
                       </a:r>
                     </a:p>
                   </a:txBody>
@@ -9511,7 +9511,7 @@
                           <a:latin typeface="D2Coding" panose="020B0609020101020101" pitchFamily="49" charset="-127"/>
                           <a:ea typeface="D2Coding" panose="020B0609020101020101" pitchFamily="49" charset="-127"/>
                         </a:rPr>
-                        <a:t>INT</a:t>
+                        <a:t>DATE</a:t>
                       </a:r>
                       <a:endParaRPr lang="ko-KR" altLang="en-US" dirty="0">
                         <a:latin typeface="D2Coding" panose="020B0609020101020101" pitchFamily="49" charset="-127"/>
@@ -9775,20 +9775,10 @@
                     <a:lstStyle/>
                     <a:p>
                       <a:pPr algn="ctr" latinLnBrk="1"/>
-                      <a:r>
-                        <a:rPr lang="en-US" altLang="ko-KR" dirty="0">
-                          <a:latin typeface="D2Coding" panose="020B0609020101020101" pitchFamily="49" charset="-127"/>
-                          <a:ea typeface="D2Coding" panose="020B0609020101020101" pitchFamily="49" charset="-127"/>
-                        </a:rPr>
-                        <a:t>0 </a:t>
-                      </a:r>
-                      <a:r>
-                        <a:rPr lang="ko-KR" altLang="en-US" dirty="0">
-                          <a:latin typeface="D2Coding" panose="020B0609020101020101" pitchFamily="49" charset="-127"/>
-                          <a:ea typeface="D2Coding" panose="020B0609020101020101" pitchFamily="49" charset="-127"/>
-                        </a:rPr>
-                        <a:t>이상</a:t>
-                      </a:r>
+                      <a:endParaRPr lang="ko-KR" altLang="en-US" dirty="0">
+                        <a:latin typeface="D2Coding" panose="020B0609020101020101" pitchFamily="49" charset="-127"/>
+                        <a:ea typeface="D2Coding" panose="020B0609020101020101" pitchFamily="49" charset="-127"/>
+                      </a:endParaRPr>
                     </a:p>
                   </a:txBody>
                   <a:tcPr>
@@ -19587,23 +19577,6 @@
 </file>
 
 <file path=customXml/item1.xml><?xml version="1.0" encoding="utf-8"?>
-<p:properties xmlns:p="http://schemas.microsoft.com/office/2006/metadata/properties" xmlns:xsi="http://www.w3.org/2001/XMLSchema-instance" xmlns:pc="http://schemas.microsoft.com/office/infopath/2007/PartnerControls">
-  <documentManagement>
-    <_activity xmlns="0132d4f7-3ff6-42a6-9c84-a78a808c16d0" xsi:nil="true"/>
-  </documentManagement>
-</p:properties>
-</file>
-
-<file path=customXml/item2.xml><?xml version="1.0" encoding="utf-8"?>
-<?mso-contentType ?>
-<FormTemplates xmlns="http://schemas.microsoft.com/sharepoint/v3/contenttype/forms">
-  <Display>DocumentLibraryForm</Display>
-  <Edit>DocumentLibraryForm</Edit>
-  <New>DocumentLibraryForm</New>
-</FormTemplates>
-</file>
-
-<file path=customXml/item3.xml><?xml version="1.0" encoding="utf-8"?>
 <ct:contentTypeSchema xmlns:ct="http://schemas.microsoft.com/office/2006/metadata/contentType" xmlns:ma="http://schemas.microsoft.com/office/2006/metadata/properties/metaAttributes" ct:_="" ma:_="" ma:contentTypeName="문서" ma:contentTypeID="0x01010005EFDECECAE815428E4874546E1D19C3" ma:contentTypeVersion="9" ma:contentTypeDescription="새 문서를 만듭니다." ma:contentTypeScope="" ma:versionID="429c9a8e833de499d4b2018ae63cc5d9">
   <xsd:schema xmlns:xsd="http://www.w3.org/2001/XMLSchema" xmlns:xs="http://www.w3.org/2001/XMLSchema" xmlns:p="http://schemas.microsoft.com/office/2006/metadata/properties" xmlns:ns3="0132d4f7-3ff6-42a6-9c84-a78a808c16d0" targetNamespace="http://schemas.microsoft.com/office/2006/metadata/properties" ma:root="true" ma:fieldsID="ce75395ae0b850c7abf8b9f135b9d0a5" ns3:_="">
     <xsd:import namespace="0132d4f7-3ff6-42a6-9c84-a78a808c16d0"/>
@@ -19779,31 +19752,24 @@
 </ct:contentTypeSchema>
 </file>
 
-<file path=customXml/itemProps1.xml><?xml version="1.0" encoding="utf-8"?>
-<ds:datastoreItem xmlns:ds="http://schemas.openxmlformats.org/officeDocument/2006/customXml" ds:itemID="{57F7998A-0A1D-4200-A855-38DEDCA51A93}">
-  <ds:schemaRefs>
-    <ds:schemaRef ds:uri="http://purl.org/dc/dcmitype/"/>
-    <ds:schemaRef ds:uri="http://schemas.microsoft.com/office/2006/metadata/properties"/>
-    <ds:schemaRef ds:uri="http://schemas.openxmlformats.org/package/2006/metadata/core-properties"/>
-    <ds:schemaRef ds:uri="http://schemas.microsoft.com/office/2006/documentManagement/types"/>
-    <ds:schemaRef ds:uri="0132d4f7-3ff6-42a6-9c84-a78a808c16d0"/>
-    <ds:schemaRef ds:uri="http://www.w3.org/XML/1998/namespace"/>
-    <ds:schemaRef ds:uri="http://purl.org/dc/elements/1.1/"/>
-    <ds:schemaRef ds:uri="http://schemas.microsoft.com/office/infopath/2007/PartnerControls"/>
-    <ds:schemaRef ds:uri="http://purl.org/dc/terms/"/>
-  </ds:schemaRefs>
-</ds:datastoreItem>
+<file path=customXml/item2.xml><?xml version="1.0" encoding="utf-8"?>
+<?mso-contentType ?>
+<FormTemplates xmlns="http://schemas.microsoft.com/sharepoint/v3/contenttype/forms">
+  <Display>DocumentLibraryForm</Display>
+  <Edit>DocumentLibraryForm</Edit>
+  <New>DocumentLibraryForm</New>
+</FormTemplates>
 </file>
 
-<file path=customXml/itemProps2.xml><?xml version="1.0" encoding="utf-8"?>
-<ds:datastoreItem xmlns:ds="http://schemas.openxmlformats.org/officeDocument/2006/customXml" ds:itemID="{57B4E66B-07E5-4060-B6A1-B3AC68499B79}">
-  <ds:schemaRefs>
-    <ds:schemaRef ds:uri="http://schemas.microsoft.com/sharepoint/v3/contenttype/forms"/>
-  </ds:schemaRefs>
-</ds:datastoreItem>
+<file path=customXml/item3.xml><?xml version="1.0" encoding="utf-8"?>
+<p:properties xmlns:p="http://schemas.microsoft.com/office/2006/metadata/properties" xmlns:xsi="http://www.w3.org/2001/XMLSchema-instance" xmlns:pc="http://schemas.microsoft.com/office/infopath/2007/PartnerControls">
+  <documentManagement>
+    <_activity xmlns="0132d4f7-3ff6-42a6-9c84-a78a808c16d0" xsi:nil="true"/>
+  </documentManagement>
+</p:properties>
 </file>
 
-<file path=customXml/itemProps3.xml><?xml version="1.0" encoding="utf-8"?>
+<file path=customXml/itemProps1.xml><?xml version="1.0" encoding="utf-8"?>
 <ds:datastoreItem xmlns:ds="http://schemas.openxmlformats.org/officeDocument/2006/customXml" ds:itemID="{174A081E-7A8A-4F14-A2C5-DA6B38839547}">
   <ds:schemaRefs>
     <ds:schemaRef ds:uri="http://schemas.microsoft.com/office/2006/metadata/contentType"/>
@@ -19819,4 +19785,28 @@
     <ds:schemaRef ds:uri="http://schemas.microsoft.com/internal/obd"/>
   </ds:schemaRefs>
 </ds:datastoreItem>
+</file>
+
+<file path=customXml/itemProps2.xml><?xml version="1.0" encoding="utf-8"?>
+<ds:datastoreItem xmlns:ds="http://schemas.openxmlformats.org/officeDocument/2006/customXml" ds:itemID="{57B4E66B-07E5-4060-B6A1-B3AC68499B79}">
+  <ds:schemaRefs>
+    <ds:schemaRef ds:uri="http://schemas.microsoft.com/sharepoint/v3/contenttype/forms"/>
+  </ds:schemaRefs>
+</ds:datastoreItem>
+</file>
+
+<file path=customXml/itemProps3.xml><?xml version="1.0" encoding="utf-8"?>
+<ds:datastoreItem xmlns:ds="http://schemas.openxmlformats.org/officeDocument/2006/customXml" ds:itemID="{57F7998A-0A1D-4200-A855-38DEDCA51A93}">
+  <ds:schemaRefs>
+    <ds:schemaRef ds:uri="http://purl.org/dc/dcmitype/"/>
+    <ds:schemaRef ds:uri="http://schemas.microsoft.com/office/2006/metadata/properties"/>
+    <ds:schemaRef ds:uri="http://schemas.openxmlformats.org/package/2006/metadata/core-properties"/>
+    <ds:schemaRef ds:uri="http://schemas.microsoft.com/office/2006/documentManagement/types"/>
+    <ds:schemaRef ds:uri="0132d4f7-3ff6-42a6-9c84-a78a808c16d0"/>
+    <ds:schemaRef ds:uri="http://www.w3.org/XML/1998/namespace"/>
+    <ds:schemaRef ds:uri="http://purl.org/dc/elements/1.1/"/>
+    <ds:schemaRef ds:uri="http://schemas.microsoft.com/office/infopath/2007/PartnerControls"/>
+    <ds:schemaRef ds:uri="http://purl.org/dc/terms/"/>
+  </ds:schemaRefs>
+</ds:datastoreItem>
 </file>